--- a/Foundations-facilitator-deck.pptx
+++ b/Foundations-facilitator-deck.pptx
@@ -7098,7 +7098,7 @@
                 <a:ea typeface="Century Gothic" pitchFamily="34" charset="-122"/>
                 <a:cs typeface="Century Gothic" pitchFamily="34" charset="-120"/>
               </a:rPr>
-              <a:t>Subject teams</a:t>
+              <a:t>Class teams</a:t>
             </a:r>
             <a:endParaRPr lang="en-US" sz="1350" dirty="0"/>
           </a:p>
@@ -7118,7 +7118,7 @@
                 <a:ea typeface="Century Gothic" pitchFamily="34" charset="-122"/>
                 <a:cs typeface="Century Gothic" pitchFamily="34" charset="-120"/>
               </a:rPr>
-              <a:t>adapting each method to the subject</a:t>
+              <a:t>adapting each method to your class</a:t>
             </a:r>
             <a:endParaRPr lang="en-US" sz="1350" dirty="0"/>
           </a:p>
@@ -7978,7 +7978,7 @@
                 <a:ea typeface="Century Gothic" pitchFamily="34" charset="-122"/>
                 <a:cs typeface="Century Gothic" pitchFamily="34" charset="-120"/>
               </a:rPr>
-              <a:t>The same words, two different rooms</a:t>
+              <a:t>What changes when a teacher has authority</a:t>
             </a:r>
             <a:endParaRPr lang="en-US" sz="2700" dirty="0"/>
           </a:p>
@@ -8086,7 +8086,7 @@
                 <a:ea typeface="Century Gothic" pitchFamily="34" charset="-122"/>
                 <a:cs typeface="Century Gothic" pitchFamily="34" charset="-120"/>
               </a:rPr>
-              <a:t>When authority is absent</a:t>
+              <a:t>When authority is missing</a:t>
             </a:r>
             <a:endParaRPr lang="en-US" sz="1600" dirty="0"/>
           </a:p>
@@ -8300,7 +8300,7 @@
                 <a:ea typeface="Century Gothic" pitchFamily="34" charset="-122"/>
                 <a:cs typeface="Century Gothic" pitchFamily="34" charset="-120"/>
               </a:rPr>
-              <a:t>When authority is carried</a:t>
+              <a:t>When authority is present</a:t>
             </a:r>
             <a:endParaRPr lang="en-US" sz="1600" dirty="0"/>
           </a:p>
@@ -8692,7 +8692,7 @@
                 <a:ea typeface="Century Gothic" pitchFamily="34" charset="-122"/>
                 <a:cs typeface="Century Gothic" pitchFamily="34" charset="-120"/>
               </a:rPr>
-              <a:t>Strong routines delivered without authority do not hold. The same routines, delivered with it, transform a room.</a:t>
+              <a:t>The routines in this programme only work when the teacher delivering them is calm, clear, and in charge of the room.</a:t>
             </a:r>
             <a:endParaRPr lang="en-US" sz="3000" dirty="0"/>
           </a:p>

--- a/Foundations-facilitator-deck.pptx
+++ b/Foundations-facilitator-deck.pptx
@@ -11881,7 +11881,7 @@
     </a:clrScheme>
     <a:fontScheme name="Office">
       <a:majorFont>
-        <a:latin typeface="Calibri Light" panose="020F0302020204030204"/>
+        <a:latin typeface="Century Gothic" panose="020F0302020204030204"/>
         <a:ea typeface=""/>
         <a:cs typeface=""/>
         <a:font script="Jpan" typeface="游ゴシック Light"/>
@@ -11933,7 +11933,7 @@
         <a:font script="Tfng" typeface="Ebrima"/>
       </a:majorFont>
       <a:minorFont>
-        <a:latin typeface="Calibri" panose="020F0502020204030204"/>
+        <a:latin typeface="Century Gothic" panose="020F0502020204030204"/>
         <a:ea typeface=""/>
         <a:cs typeface=""/>
         <a:font script="Jpan" typeface="游ゴシック"/>
